--- a/docs/Yasir_CA2_Slide_Research_Timeline.pptx
+++ b/docs/Yasir_CA2_Slide_Research_Timeline.pptx
@@ -378,7 +378,7 @@
           <a:lstStyle/>
           <a:p>
             <a:r>
-              <a:t>This is the same plan as a timeline. Chapters one to six and the BWCCA conference paper are done. The SLR journal paper and Chapter 7 on RO4 are in progress. In December, I plan Chapter 8 on RO5 and Chapter 9 with the conclusion. In January 2027, the journal paper on formal assurance. Then the next candidature assessment in February 2027, and thesis submission in May 2027.</a:t>
+              <a:t>This is the same plan as a timeline. Chapters one to seven and the BWCCA conference paper are done. The SLR journal paper is ready for submission. In December, I plan Chapter 8 on RO5 and Chapter 9 with the conclusion. In January 2027, the journal paper on formal assurance. Then the next candidature assessment in February 2027, and thesis submission in May 2027.</a:t>
             </a:r>
           </a:p>
         </p:txBody>

--- a/docs/Yasir_CA2_Slide_Research_Timeline.pptx
+++ b/docs/Yasir_CA2_Slide_Research_Timeline.pptx
@@ -378,7 +378,7 @@
           <a:lstStyle/>
           <a:p>
             <a:r>
-              <a:t>This is the same plan as a timeline. Chapters one to seven and the BWCCA conference paper are done. The SLR journal paper is ready for submission. In December, I plan Chapter 8 on RO5 and Chapter 9 with the conclusion. In January 2027, the journal paper on formal assurance. Then the next candidature assessment in February 2027, and thesis submission in May 2027.</a:t>
+              <a:t>This is the same plan as a timeline. Chapters one to seven and the BWCCA conference paper are done. The SLR journal paper is ready for submission, and Chapter 8 on RO5 is in progress. In December, Chapter 9 with the conclusion. In January 2027, the journal paper on formal assurance. Then the next candidature assessment in February 2027, and thesis submission in May 2027.</a:t>
             </a:r>
           </a:p>
         </p:txBody>
